--- a/slides/release/02-anatomy-of-a-prompt.pptx
+++ b/slides/release/02-anatomy-of-a-prompt.pptx
@@ -2445,9 +2445,6 @@
             <a:endParaRPr lang="en-US" dirty="0"/>
           </a:p>
           <a:p>
-            <a:endParaRPr lang="en-US" dirty="0"/>
-          </a:p>
-          <a:p>
             <a:endParaRPr dirty="0"/>
           </a:p>
           <a:p>
@@ -2510,7 +2507,7 @@
         </p:blipFill>
         <p:spPr>
           <a:xfrm>
-            <a:off x="28575" y="2015331"/>
+            <a:off x="0" y="2015331"/>
             <a:ext cx="8915400" cy="1170547"/>
           </a:xfrm>
           <a:prstGeom prst="rect">
@@ -2526,7 +2523,7 @@
         </p:nvSpPr>
         <p:spPr>
           <a:xfrm>
-            <a:off x="419100" y="5986151"/>
+            <a:off x="419100" y="5969113"/>
             <a:ext cx="7507224" cy="1316736"/>
           </a:xfrm>
           <a:prstGeom prst="rect">
@@ -2561,7 +2558,7 @@
           <a:p>
             <a:pPr algn="ctr"/>
             <a:r>
-              <a:rPr sz="1800" i="1">
+              <a:rPr sz="1800" i="1" dirty="0">
                 <a:solidFill>
                   <a:srgbClr val="333333"/>
                 </a:solidFill>
@@ -2704,7 +2701,7 @@
         </p:nvSpPr>
         <p:spPr>
           <a:xfrm>
-            <a:off x="234950" y="5215731"/>
+            <a:off x="495300" y="4606131"/>
             <a:ext cx="7507224" cy="877824"/>
           </a:xfrm>
           <a:prstGeom prst="rect">
@@ -2922,7 +2919,7 @@
         </p:nvSpPr>
         <p:spPr>
           <a:xfrm>
-            <a:off x="675513" y="5368131"/>
+            <a:off x="571500" y="6360483"/>
             <a:ext cx="7507224" cy="877824"/>
           </a:xfrm>
           <a:prstGeom prst="rect">
@@ -3149,7 +3146,7 @@
         </p:nvSpPr>
         <p:spPr>
           <a:xfrm>
-            <a:off x="571500" y="6425063"/>
+            <a:off x="571500" y="6627481"/>
             <a:ext cx="7507224" cy="877824"/>
           </a:xfrm>
           <a:prstGeom prst="rect">
@@ -3331,7 +3328,7 @@
         </p:blipFill>
         <p:spPr>
           <a:xfrm>
-            <a:off x="263525" y="3920331"/>
+            <a:off x="0" y="3678135"/>
             <a:ext cx="8915400" cy="728325"/>
           </a:xfrm>
           <a:prstGeom prst="rect">
@@ -3347,235 +3344,7 @@
         </p:nvSpPr>
         <p:spPr>
           <a:xfrm>
-            <a:off x="495300" y="6390181"/>
-            <a:ext cx="8077200" cy="1111550"/>
-          </a:xfrm>
-          <a:prstGeom prst="rect">
-            <a:avLst/>
-          </a:prstGeom>
-          <a:solidFill>
-            <a:srgbClr val="F2F2F2"/>
-          </a:solidFill>
-          <a:ln>
-            <a:solidFill>
-              <a:srgbClr val="D9D9D9"/>
-            </a:solidFill>
-          </a:ln>
-        </p:spPr>
-        <p:style>
-          <a:lnRef idx="1">
-            <a:schemeClr val="accent1"/>
-          </a:lnRef>
-          <a:fillRef idx="3">
-            <a:schemeClr val="accent1"/>
-          </a:fillRef>
-          <a:effectRef idx="2">
-            <a:schemeClr val="accent1"/>
-          </a:effectRef>
-          <a:fontRef idx="minor">
-            <a:schemeClr val="lt1"/>
-          </a:fontRef>
-        </p:style>
-        <p:txBody>
-          <a:bodyPr lIns="128016" tIns="73152" rIns="128016" bIns="73152" rtlCol="0" anchor="ctr"/>
-          <a:lstStyle/>
-          <a:p>
-            <a:pPr algn="ctr"/>
-            <a:r>
-              <a:rPr sz="1800" i="1">
-                <a:solidFill>
-                  <a:srgbClr val="333333"/>
-                </a:solidFill>
-              </a:rPr>
-              <a:t>Reading a file is what you give the model. The task is a verb you ask it to do.</a:t>
-            </a:r>
-          </a:p>
-        </p:txBody>
-      </p:sp>
-    </p:spTree>
-  </p:cSld>
-  <p:clrMapOvr>
-    <a:masterClrMapping/>
-  </p:clrMapOvr>
-</p:sld>
-</file>
-
-<file path=ppt/slides/slide5.xml><?xml version="1.0" encoding="utf-8"?>
-<p:sld xmlns:a="http://schemas.openxmlformats.org/drawingml/2006/main" xmlns:r="http://schemas.openxmlformats.org/officeDocument/2006/relationships" xmlns:p="http://schemas.openxmlformats.org/presentationml/2006/main">
-  <p:cSld>
-    <p:spTree>
-      <p:nvGrpSpPr>
-        <p:cNvPr id="1" name=""/>
-        <p:cNvGrpSpPr/>
-        <p:nvPr/>
-      </p:nvGrpSpPr>
-      <p:grpSpPr>
-        <a:xfrm>
-          <a:off x="0" y="0"/>
-          <a:ext cx="0" cy="0"/>
-          <a:chOff x="0" y="0"/>
-          <a:chExt cx="0" cy="0"/>
-        </a:xfrm>
-      </p:grpSpPr>
-      <p:sp>
-        <p:nvSpPr>
-          <p:cNvPr id="2" name="Title 1"/>
-          <p:cNvSpPr>
-            <a:spLocks noGrp="1"/>
-          </p:cNvSpPr>
-          <p:nvPr>
-            <p:ph type="title"/>
-          </p:nvPr>
-        </p:nvSpPr>
-        <p:spPr/>
-        <p:txBody>
-          <a:bodyPr/>
-          <a:lstStyle/>
-          <a:p>
-            <a:r>
-              <a:t>Being Specific: Kill the Ambiguity</a:t>
-            </a:r>
-          </a:p>
-        </p:txBody>
-      </p:sp>
-      <p:sp>
-        <p:nvSpPr>
-          <p:cNvPr id="3" name="Content Placeholder 2"/>
-          <p:cNvSpPr>
-            <a:spLocks noGrp="1"/>
-          </p:cNvSpPr>
-          <p:nvPr>
-            <p:ph idx="1"/>
-          </p:nvPr>
-        </p:nvSpPr>
-        <p:spPr/>
-        <p:txBody>
-          <a:bodyPr/>
-          <a:lstStyle/>
-          <a:p>
-            <a:r>
-              <a:t> A vague prompt isn't "open-ended" — it's</a:t>
-            </a:r>
-            <a:r>
-              <a:rPr b="1"/>
-              <a:t> under-specified</a:t>
-            </a:r>
-            <a:r>
-              <a:t> . The model fills gaps with guesses, often wrong.</a:t>
-            </a:r>
-          </a:p>
-          <a:p>
-            <a:r>
-              <a:t> Three questions turn vague into specific:</a:t>
-            </a:r>
-          </a:p>
-          <a:p>
-            <a:pPr lvl="1"/>
-            <a:r>
-              <a:rPr b="1"/>
-              <a:t> Who is it for?</a:t>
-            </a:r>
-            <a:r>
-              <a:t> (a nurse, a CFO, a new customer)</a:t>
-            </a:r>
-          </a:p>
-          <a:p>
-            <a:pPr lvl="1"/>
-            <a:r>
-              <a:rPr b="1"/>
-              <a:t> What's the job?</a:t>
-            </a:r>
-            <a:r>
-              <a:t> (decide, persuade, inform, triage)</a:t>
-            </a:r>
-          </a:p>
-          <a:p>
-            <a:pPr lvl="1"/>
-            <a:r>
-              <a:rPr b="1"/>
-              <a:t> What does done look like?</a:t>
-            </a:r>
-            <a:r>
-              <a:t> (length, format, tone)</a:t>
-            </a:r>
-          </a:p>
-          <a:p>
-            <a:endParaRPr/>
-          </a:p>
-          <a:p>
-            <a:endParaRPr/>
-          </a:p>
-          <a:p>
-            <a:endParaRPr/>
-          </a:p>
-        </p:txBody>
-      </p:sp>
-      <p:sp>
-        <p:nvSpPr>
-          <p:cNvPr id="4" name="TextBox 3"/>
-          <p:cNvSpPr txBox="1"/>
-          <p:nvPr/>
-        </p:nvSpPr>
-        <p:spPr>
-          <a:xfrm>
-            <a:off x="704088" y="8065008"/>
-            <a:ext cx="8915400" cy="228600"/>
-          </a:xfrm>
-          <a:prstGeom prst="rect">
-            <a:avLst/>
-          </a:prstGeom>
-          <a:noFill/>
-        </p:spPr>
-        <p:txBody>
-          <a:bodyPr wrap="none">
-            <a:spAutoFit/>
-          </a:bodyPr>
-          <a:lstStyle/>
-          <a:p>
-            <a:r>
-              <a:rPr sz="800">
-                <a:solidFill>
-                  <a:srgbClr val="000000"/>
-                </a:solidFill>
-              </a:rPr>
-              <a:t>Copyright © 2026 by Elephant Scale, All Rights Reserved</a:t>
-            </a:r>
-          </a:p>
-        </p:txBody>
-      </p:sp>
-      <p:pic>
-        <p:nvPicPr>
-          <p:cNvPr id="5" name="Picture 4" descr="1.png"/>
-          <p:cNvPicPr>
-            <a:picLocks noChangeAspect="1"/>
-          </p:cNvPicPr>
-          <p:nvPr/>
-        </p:nvPicPr>
-        <p:blipFill>
-          <a:blip r:embed="rId2"/>
-          <a:stretch>
-            <a:fillRect/>
-          </a:stretch>
-        </p:blipFill>
-        <p:spPr>
-          <a:xfrm>
-            <a:off x="215900" y="4069137"/>
-            <a:ext cx="8915400" cy="680127"/>
-          </a:xfrm>
-          <a:prstGeom prst="rect">
-            <a:avLst/>
-          </a:prstGeom>
-        </p:spPr>
-      </p:pic>
-      <p:sp>
-        <p:nvSpPr>
-          <p:cNvPr id="6" name="Rectangle 5"/>
-          <p:cNvSpPr/>
-          <p:nvPr/>
-        </p:nvSpPr>
-        <p:spPr>
-          <a:xfrm>
-            <a:off x="342900" y="5755309"/>
+            <a:off x="704088" y="6552614"/>
             <a:ext cx="7507224" cy="877824"/>
           </a:xfrm>
           <a:prstGeom prst="rect">
@@ -3615,7 +3384,7 @@
                   <a:srgbClr val="333333"/>
                 </a:solidFill>
               </a:rPr>
-              <a:t>"Professional" means three different things to a lawyer, a nurse, a founder. Say which.</a:t>
+              <a:t>Reading a file is what you give the model. The task is a verb you ask it to do.</a:t>
             </a:r>
           </a:p>
         </p:txBody>
@@ -3628,7 +3397,7 @@
 </p:sld>
 </file>
 
-<file path=ppt/slides/slide6.xml><?xml version="1.0" encoding="utf-8"?>
+<file path=ppt/slides/slide5.xml><?xml version="1.0" encoding="utf-8"?>
 <p:sld xmlns:a="http://schemas.openxmlformats.org/drawingml/2006/main" xmlns:r="http://schemas.openxmlformats.org/officeDocument/2006/relationships" xmlns:p="http://schemas.openxmlformats.org/presentationml/2006/main">
   <p:cSld>
     <p:spTree>
@@ -3661,7 +3430,7 @@
           <a:lstStyle/>
           <a:p>
             <a:r>
-              <a:t>Give It the Source — Don't Trust Its Memory</a:t>
+              <a:t>Being Specific: Kill the Ambiguity</a:t>
             </a:r>
           </a:p>
         </p:txBody>
@@ -3682,52 +3451,59 @@
           <a:lstStyle/>
           <a:p>
             <a:r>
-              <a:rPr dirty="0"/>
-              <a:t> Training memory is broad, stale, and</a:t>
-            </a:r>
-            <a:r>
-              <a:rPr b="1" dirty="0"/>
-              <a:t> confidently fillable</a:t>
-            </a:r>
-            <a:r>
-              <a:rPr dirty="0"/>
-              <a:t> — it'll invent a policy rather than admit it doesn't know yours.</a:t>
-            </a:r>
-          </a:p>
-          <a:p>
-            <a:r>
-              <a:rPr dirty="0"/>
-              <a:t> Fix:</a:t>
-            </a:r>
-            <a:r>
-              <a:rPr b="1" dirty="0"/>
-              <a:t> paste or attach the real material</a:t>
-            </a:r>
-            <a:r>
-              <a:rPr dirty="0"/>
-              <a:t> , add a source boundary.</a:t>
-            </a:r>
-          </a:p>
-          <a:p>
-            <a:endParaRPr lang="en-US" dirty="0"/>
-          </a:p>
-          <a:p>
-            <a:endParaRPr lang="en-US" dirty="0"/>
-          </a:p>
-          <a:p>
-            <a:endParaRPr lang="en-US" dirty="0"/>
-          </a:p>
-          <a:p>
-            <a:endParaRPr dirty="0"/>
-          </a:p>
-          <a:p>
-            <a:r>
-              <a:rPr dirty="0"/>
-              <a:t> The single biggest defense against hallucination — pushed further in Modules 4 and 5.</a:t>
-            </a:r>
-          </a:p>
-          <a:p>
-            <a:endParaRPr dirty="0"/>
+              <a:t> A vague prompt isn't "open-ended" — it's</a:t>
+            </a:r>
+            <a:r>
+              <a:rPr b="1"/>
+              <a:t> under-specified</a:t>
+            </a:r>
+            <a:r>
+              <a:t> . The model fills gaps with guesses, often wrong.</a:t>
+            </a:r>
+          </a:p>
+          <a:p>
+            <a:r>
+              <a:t> Three questions turn vague into specific:</a:t>
+            </a:r>
+          </a:p>
+          <a:p>
+            <a:pPr lvl="1"/>
+            <a:r>
+              <a:rPr b="1"/>
+              <a:t> Who is it for?</a:t>
+            </a:r>
+            <a:r>
+              <a:t> (a nurse, a CFO, a new customer)</a:t>
+            </a:r>
+          </a:p>
+          <a:p>
+            <a:pPr lvl="1"/>
+            <a:r>
+              <a:rPr b="1"/>
+              <a:t> What's the job?</a:t>
+            </a:r>
+            <a:r>
+              <a:t> (decide, persuade, inform, triage)</a:t>
+            </a:r>
+          </a:p>
+          <a:p>
+            <a:pPr lvl="1"/>
+            <a:r>
+              <a:rPr b="1"/>
+              <a:t> What does done look like?</a:t>
+            </a:r>
+            <a:r>
+              <a:t> (length, format, tone)</a:t>
+            </a:r>
+          </a:p>
+          <a:p>
+            <a:endParaRPr/>
+          </a:p>
+          <a:p>
+            <a:endParaRPr/>
+          </a:p>
+          <a:p>
+            <a:endParaRPr/>
           </a:p>
         </p:txBody>
       </p:sp>
@@ -3780,8 +3556,8 @@
         </p:blipFill>
         <p:spPr>
           <a:xfrm>
-            <a:off x="19050" y="3234531"/>
-            <a:ext cx="8915400" cy="502504"/>
+            <a:off x="0" y="4015938"/>
+            <a:ext cx="8915400" cy="680127"/>
           </a:xfrm>
           <a:prstGeom prst="rect">
             <a:avLst/>
@@ -3796,7 +3572,7 @@
         </p:nvSpPr>
         <p:spPr>
           <a:xfrm>
-            <a:off x="704088" y="5598354"/>
+            <a:off x="571500" y="6282531"/>
             <a:ext cx="7507224" cy="877824"/>
           </a:xfrm>
           <a:prstGeom prst="rect">
@@ -3836,7 +3612,7 @@
                   <a:srgbClr val="333333"/>
                 </a:solidFill>
               </a:rPr>
-              <a:t>If the answer has to be right, don't ask the model to remember it. Give it to the model.</a:t>
+              <a:t>"Professional" means three different things to a lawyer, a nurse, a founder. Say which.</a:t>
             </a:r>
           </a:p>
         </p:txBody>
@@ -3849,7 +3625,7 @@
 </p:sld>
 </file>
 
-<file path=ppt/slides/slide7.xml><?xml version="1.0" encoding="utf-8"?>
+<file path=ppt/slides/slide6.xml><?xml version="1.0" encoding="utf-8"?>
 <p:sld xmlns:a="http://schemas.openxmlformats.org/drawingml/2006/main" xmlns:r="http://schemas.openxmlformats.org/officeDocument/2006/relationships" xmlns:p="http://schemas.openxmlformats.org/presentationml/2006/main">
   <p:cSld>
     <p:spTree>
@@ -3882,7 +3658,7 @@
           <a:lstStyle/>
           <a:p>
             <a:r>
-              <a:t>Zero-Shot vs. Few-Shot — Teaching by Example</a:t>
+              <a:t>Give It the Source — Don't Trust Its Memory</a:t>
             </a:r>
           </a:p>
         </p:txBody>
@@ -3903,40 +3679,46 @@
           <a:lstStyle/>
           <a:p>
             <a:r>
-              <a:rPr b="1"/>
-              <a:t> Zero-shot:</a:t>
-            </a:r>
-            <a:r>
-              <a:t> just describe the task. Fine for common, well-understood asks.</a:t>
-            </a:r>
-          </a:p>
-          <a:p>
-            <a:r>
-              <a:rPr b="1"/>
-              <a:t> Few-shot:</a:t>
-            </a:r>
-            <a:r>
-              <a:t> include 1–3 input → output examples. Use when</a:t>
-            </a:r>
-            <a:r>
-              <a:rPr b="1"/>
-              <a:t> format or style</a:t>
-            </a:r>
-            <a:r>
-              <a:t> is specific, or the model keeps missing the shape.</a:t>
-            </a:r>
-          </a:p>
-          <a:p>
-            <a:endParaRPr/>
-          </a:p>
-          <a:p>
-            <a:endParaRPr/>
-          </a:p>
-          <a:p>
-            <a:endParaRPr/>
-          </a:p>
-          <a:p>
-            <a:endParaRPr/>
+              <a:rPr dirty="0"/>
+              <a:t> Training memory is broad, stale, and</a:t>
+            </a:r>
+            <a:r>
+              <a:rPr b="1" dirty="0"/>
+              <a:t> confidently fillable</a:t>
+            </a:r>
+            <a:r>
+              <a:rPr dirty="0"/>
+              <a:t> — it'll invent a policy rather than admit it doesn't know yours.</a:t>
+            </a:r>
+          </a:p>
+          <a:p>
+            <a:r>
+              <a:rPr dirty="0"/>
+              <a:t> Fix:</a:t>
+            </a:r>
+            <a:r>
+              <a:rPr b="1" dirty="0"/>
+              <a:t> paste or attach the real material</a:t>
+            </a:r>
+            <a:r>
+              <a:rPr dirty="0"/>
+              <a:t> , add a source boundary.</a:t>
+            </a:r>
+          </a:p>
+          <a:p>
+            <a:endParaRPr dirty="0"/>
+          </a:p>
+          <a:p>
+            <a:endParaRPr lang="en-US" dirty="0"/>
+          </a:p>
+          <a:p>
+            <a:r>
+              <a:rPr dirty="0"/>
+              <a:t> The single biggest defense against hallucination — pushed further in Modules 4 and 5.</a:t>
+            </a:r>
+          </a:p>
+          <a:p>
+            <a:endParaRPr dirty="0"/>
           </a:p>
         </p:txBody>
       </p:sp>
@@ -3989,8 +3771,8 @@
         </p:blipFill>
         <p:spPr>
           <a:xfrm>
-            <a:off x="0" y="3691731"/>
-            <a:ext cx="9411265" cy="1777920"/>
+            <a:off x="19050" y="2751225"/>
+            <a:ext cx="8915400" cy="502504"/>
           </a:xfrm>
           <a:prstGeom prst="rect">
             <a:avLst/>
@@ -4005,7 +3787,7 @@
         </p:nvSpPr>
         <p:spPr>
           <a:xfrm>
-            <a:off x="234950" y="6206331"/>
+            <a:off x="419100" y="6627481"/>
             <a:ext cx="7507224" cy="877824"/>
           </a:xfrm>
           <a:prstGeom prst="rect">
@@ -4045,7 +3827,7 @@
                   <a:srgbClr val="333333"/>
                 </a:solidFill>
               </a:rPr>
-              <a:t>One good example teaches more than a paragraph of adjectives. Show, don't only tell.</a:t>
+              <a:t>If the answer has to be right, don't ask the model to remember it. Give it to the model.</a:t>
             </a:r>
           </a:p>
         </p:txBody>
@@ -4058,7 +3840,7 @@
 </p:sld>
 </file>
 
-<file path=ppt/slides/slide8.xml><?xml version="1.0" encoding="utf-8"?>
+<file path=ppt/slides/slide7.xml><?xml version="1.0" encoding="utf-8"?>
 <p:sld xmlns:a="http://schemas.openxmlformats.org/drawingml/2006/main" xmlns:r="http://schemas.openxmlformats.org/officeDocument/2006/relationships" xmlns:p="http://schemas.openxmlformats.org/presentationml/2006/main">
   <p:cSld>
     <p:spTree>
@@ -4091,7 +3873,7 @@
           <a:lstStyle/>
           <a:p>
             <a:r>
-              <a:t>Controlling Tone, Length, and Audience</a:t>
+              <a:t>Zero-Shot vs. Few-Shot — Teaching by Example</a:t>
             </a:r>
           </a:p>
         </p:txBody>
@@ -4112,55 +3894,37 @@
           <a:lstStyle/>
           <a:p>
             <a:r>
-              <a:t> These are</a:t>
-            </a:r>
-            <a:r>
               <a:rPr b="1"/>
-              <a:t> constraints</a:t>
-            </a:r>
-            <a:r>
-              <a:t> — the most-skipped block, and why "correct" answers still come back unusable.</a:t>
-            </a:r>
-          </a:p>
-          <a:p>
-            <a:pPr lvl="1"/>
+              <a:t> Zero-shot:</a:t>
+            </a:r>
+            <a:r>
+              <a:t> just describe the task. Fine for common, well-understood asks.</a:t>
+            </a:r>
+          </a:p>
+          <a:p>
             <a:r>
               <a:rPr b="1"/>
-              <a:t> Length:</a:t>
-            </a:r>
-            <a:r>
-              <a:t> "under 120 words", "exactly 5 bullets", "one paragraph".</a:t>
-            </a:r>
-          </a:p>
-          <a:p>
-            <a:pPr lvl="1"/>
+              <a:t> Few-shot:</a:t>
+            </a:r>
+            <a:r>
+              <a:t> include 1–3 input → output examples. Use when</a:t>
+            </a:r>
             <a:r>
               <a:rPr b="1"/>
-              <a:t> Tone:</a:t>
-            </a:r>
-            <a:r>
-              <a:t> "warm and direct" — or better, "match the attached brand voice" (Module 3).</a:t>
-            </a:r>
-          </a:p>
-          <a:p>
-            <a:pPr lvl="1"/>
-            <a:r>
-              <a:rPr b="1"/>
-              <a:t> Audience:</a:t>
-            </a:r>
-            <a:r>
-              <a:t> name them. A VP reads differently than a new hire.</a:t>
-            </a:r>
-          </a:p>
-          <a:p>
-            <a:pPr lvl="1"/>
-            <a:r>
-              <a:rPr b="1"/>
-              <a:t> Must-avoid:</a:t>
-            </a:r>
-            <a:r>
-              <a:t> hype words, jargon, exclamation points, promises you can't keep.</a:t>
-            </a:r>
+              <a:t> format or style</a:t>
+            </a:r>
+            <a:r>
+              <a:t> is specific, or the model keeps missing the shape.</a:t>
+            </a:r>
+          </a:p>
+          <a:p>
+            <a:endParaRPr/>
+          </a:p>
+          <a:p>
+            <a:endParaRPr/>
+          </a:p>
+          <a:p>
+            <a:endParaRPr/>
           </a:p>
           <a:p>
             <a:endParaRPr/>
@@ -4200,15 +3964,39 @@
           </a:p>
         </p:txBody>
       </p:sp>
-      <p:sp>
-        <p:nvSpPr>
-          <p:cNvPr id="5" name="Rectangle 4"/>
+      <p:pic>
+        <p:nvPicPr>
+          <p:cNvPr id="5" name="Picture 4" descr="1.png"/>
+          <p:cNvPicPr>
+            <a:picLocks noChangeAspect="1"/>
+          </p:cNvPicPr>
+          <p:nvPr/>
+        </p:nvPicPr>
+        <p:blipFill>
+          <a:blip r:embed="rId2"/>
+          <a:stretch>
+            <a:fillRect/>
+          </a:stretch>
+        </p:blipFill>
+        <p:spPr>
+          <a:xfrm>
+            <a:off x="0" y="3584815"/>
+            <a:ext cx="9372600" cy="1770616"/>
+          </a:xfrm>
+          <a:prstGeom prst="rect">
+            <a:avLst/>
+          </a:prstGeom>
+        </p:spPr>
+      </p:pic>
+      <p:sp>
+        <p:nvSpPr>
+          <p:cNvPr id="6" name="Rectangle 5"/>
           <p:cNvSpPr/>
           <p:nvPr/>
         </p:nvSpPr>
         <p:spPr>
           <a:xfrm>
-            <a:off x="704088" y="4864608"/>
+            <a:off x="704088" y="6863975"/>
             <a:ext cx="7507224" cy="877824"/>
           </a:xfrm>
           <a:prstGeom prst="rect">
@@ -4248,6 +4036,209 @@
                   <a:srgbClr val="333333"/>
                 </a:solidFill>
               </a:rPr>
+              <a:t>One good example teaches more than a paragraph of adjectives. Show, don't only tell.</a:t>
+            </a:r>
+          </a:p>
+        </p:txBody>
+      </p:sp>
+    </p:spTree>
+  </p:cSld>
+  <p:clrMapOvr>
+    <a:masterClrMapping/>
+  </p:clrMapOvr>
+</p:sld>
+</file>
+
+<file path=ppt/slides/slide8.xml><?xml version="1.0" encoding="utf-8"?>
+<p:sld xmlns:a="http://schemas.openxmlformats.org/drawingml/2006/main" xmlns:r="http://schemas.openxmlformats.org/officeDocument/2006/relationships" xmlns:p="http://schemas.openxmlformats.org/presentationml/2006/main">
+  <p:cSld>
+    <p:spTree>
+      <p:nvGrpSpPr>
+        <p:cNvPr id="1" name=""/>
+        <p:cNvGrpSpPr/>
+        <p:nvPr/>
+      </p:nvGrpSpPr>
+      <p:grpSpPr>
+        <a:xfrm>
+          <a:off x="0" y="0"/>
+          <a:ext cx="0" cy="0"/>
+          <a:chOff x="0" y="0"/>
+          <a:chExt cx="0" cy="0"/>
+        </a:xfrm>
+      </p:grpSpPr>
+      <p:sp>
+        <p:nvSpPr>
+          <p:cNvPr id="2" name="Title 1"/>
+          <p:cNvSpPr>
+            <a:spLocks noGrp="1"/>
+          </p:cNvSpPr>
+          <p:nvPr>
+            <p:ph type="title"/>
+          </p:nvPr>
+        </p:nvSpPr>
+        <p:spPr/>
+        <p:txBody>
+          <a:bodyPr/>
+          <a:lstStyle/>
+          <a:p>
+            <a:r>
+              <a:t>Controlling Tone, Length, and Audience</a:t>
+            </a:r>
+          </a:p>
+        </p:txBody>
+      </p:sp>
+      <p:sp>
+        <p:nvSpPr>
+          <p:cNvPr id="3" name="Content Placeholder 2"/>
+          <p:cNvSpPr>
+            <a:spLocks noGrp="1"/>
+          </p:cNvSpPr>
+          <p:nvPr>
+            <p:ph idx="1"/>
+          </p:nvPr>
+        </p:nvSpPr>
+        <p:spPr/>
+        <p:txBody>
+          <a:bodyPr/>
+          <a:lstStyle/>
+          <a:p>
+            <a:r>
+              <a:t> These are</a:t>
+            </a:r>
+            <a:r>
+              <a:rPr b="1"/>
+              <a:t> constraints</a:t>
+            </a:r>
+            <a:r>
+              <a:t> — the most-skipped block, and why "correct" answers still come back unusable.</a:t>
+            </a:r>
+          </a:p>
+          <a:p>
+            <a:pPr lvl="1"/>
+            <a:r>
+              <a:rPr b="1"/>
+              <a:t> Length:</a:t>
+            </a:r>
+            <a:r>
+              <a:t> "under 120 words", "exactly 5 bullets", "one paragraph".</a:t>
+            </a:r>
+          </a:p>
+          <a:p>
+            <a:pPr lvl="1"/>
+            <a:r>
+              <a:rPr b="1"/>
+              <a:t> Tone:</a:t>
+            </a:r>
+            <a:r>
+              <a:t> "warm and direct" — or better, "match the attached brand voice" (Module 3).</a:t>
+            </a:r>
+          </a:p>
+          <a:p>
+            <a:pPr lvl="1"/>
+            <a:r>
+              <a:rPr b="1"/>
+              <a:t> Audience:</a:t>
+            </a:r>
+            <a:r>
+              <a:t> name them. A VP reads differently than a new hire.</a:t>
+            </a:r>
+          </a:p>
+          <a:p>
+            <a:pPr lvl="1"/>
+            <a:r>
+              <a:rPr b="1"/>
+              <a:t> Must-avoid:</a:t>
+            </a:r>
+            <a:r>
+              <a:t> hype words, jargon, exclamation points, promises you can't keep.</a:t>
+            </a:r>
+          </a:p>
+          <a:p>
+            <a:endParaRPr/>
+          </a:p>
+        </p:txBody>
+      </p:sp>
+      <p:sp>
+        <p:nvSpPr>
+          <p:cNvPr id="4" name="TextBox 3"/>
+          <p:cNvSpPr txBox="1"/>
+          <p:nvPr/>
+        </p:nvSpPr>
+        <p:spPr>
+          <a:xfrm>
+            <a:off x="704088" y="8065008"/>
+            <a:ext cx="8915400" cy="228600"/>
+          </a:xfrm>
+          <a:prstGeom prst="rect">
+            <a:avLst/>
+          </a:prstGeom>
+          <a:noFill/>
+        </p:spPr>
+        <p:txBody>
+          <a:bodyPr wrap="none">
+            <a:spAutoFit/>
+          </a:bodyPr>
+          <a:lstStyle/>
+          <a:p>
+            <a:r>
+              <a:rPr sz="800">
+                <a:solidFill>
+                  <a:srgbClr val="000000"/>
+                </a:solidFill>
+              </a:rPr>
+              <a:t>Copyright © 2026 by Elephant Scale, All Rights Reserved</a:t>
+            </a:r>
+          </a:p>
+        </p:txBody>
+      </p:sp>
+      <p:sp>
+        <p:nvSpPr>
+          <p:cNvPr id="5" name="Rectangle 4"/>
+          <p:cNvSpPr/>
+          <p:nvPr/>
+        </p:nvSpPr>
+        <p:spPr>
+          <a:xfrm>
+            <a:off x="234950" y="5368131"/>
+            <a:ext cx="7507224" cy="877824"/>
+          </a:xfrm>
+          <a:prstGeom prst="rect">
+            <a:avLst/>
+          </a:prstGeom>
+          <a:solidFill>
+            <a:srgbClr val="F2F2F2"/>
+          </a:solidFill>
+          <a:ln>
+            <a:solidFill>
+              <a:srgbClr val="D9D9D9"/>
+            </a:solidFill>
+          </a:ln>
+        </p:spPr>
+        <p:style>
+          <a:lnRef idx="1">
+            <a:schemeClr val="accent1"/>
+          </a:lnRef>
+          <a:fillRef idx="3">
+            <a:schemeClr val="accent1"/>
+          </a:fillRef>
+          <a:effectRef idx="2">
+            <a:schemeClr val="accent1"/>
+          </a:effectRef>
+          <a:fontRef idx="minor">
+            <a:schemeClr val="lt1"/>
+          </a:fontRef>
+        </p:style>
+        <p:txBody>
+          <a:bodyPr lIns="128016" tIns="73152" rIns="128016" bIns="73152" rtlCol="0" anchor="ctr"/>
+          <a:lstStyle/>
+          <a:p>
+            <a:pPr algn="ctr"/>
+            <a:r>
+              <a:rPr sz="1800" i="1">
+                <a:solidFill>
+                  <a:srgbClr val="333333"/>
+                </a:solidFill>
+              </a:rPr>
               <a:t>Right content in the wrong shape is rework. Constraints stop you paying that tax.</a:t>
             </a:r>
           </a:p>
@@ -4421,7 +4412,7 @@
         </p:blipFill>
         <p:spPr>
           <a:xfrm>
-            <a:off x="0" y="3893067"/>
+            <a:off x="114300" y="3360148"/>
             <a:ext cx="8915400" cy="557212"/>
           </a:xfrm>
           <a:prstGeom prst="rect">
@@ -4437,7 +4428,7 @@
         </p:nvSpPr>
         <p:spPr>
           <a:xfrm>
-            <a:off x="704088" y="6409060"/>
+            <a:off x="704088" y="6282531"/>
             <a:ext cx="7507224" cy="877824"/>
           </a:xfrm>
           <a:prstGeom prst="rect">
